--- a/decks/englang-p1/englang-p1_ch5_q4-evaluation.pptx
+++ b/decks/englang-p1/englang-p1_ch5_q4-evaluation.pptx
@@ -121,47 +121,47 @@
   <p:extLst>
     <p:ext uri="{521415D9-36F7-43E2-AB2F-B90AF26B5E84}">
       <p14:sectionLst xmlns:p14="http://schemas.microsoft.com/office/powerpoint/2010/main">
-        <p14:section name="Opening" id="{19b0b680-b7cb-19fc-e91b-0ae7c02c4c45}">
+        <p14:section name="Opening" id="{0cfcf4fd-1451-098e-6850-b71c2c05d224}">
           <p14:sldIdLst>
             <p14:sldId id="256"/>
           </p14:sldIdLst>
         </p14:section>
-        <p14:section name="Gate" id="{9d5af4ff-b019-7694-d84c-cfaba0a76ba3}">
+        <p14:section name="Gate" id="{2a0bed3f-1d02-83a0-fb36-167518dcc2b4}">
           <p14:sldIdLst>
             <p14:sldId id="257"/>
             <p14:sldId id="258"/>
           </p14:sldIdLst>
         </p14:section>
-        <p14:section name="Pre-teach" id="{fc4094b7-226f-7cee-f006-217f1ac0f423}">
+        <p14:section name="Pre-teach" id="{7ceaae61-faca-73bb-ce2f-3cf669f71795}">
           <p14:sldIdLst>
             <p14:sldId id="259"/>
           </p14:sldIdLst>
         </p14:section>
-        <p14:section name="Read-along" id="{0ba750b1-2ec7-151b-c617-693c6f6eb859}">
+        <p14:section name="Read-along" id="{16bf0fe1-b9b1-71f4-38e2-bcd246afb5e6}">
           <p14:sldIdLst>
             <p14:sldId id="260"/>
           </p14:sldIdLst>
         </p14:section>
-        <p14:section name="Teach" id="{f2a6914a-c519-2a35-8c91-99fe6dd2b1a8}">
+        <p14:section name="Teach" id="{84a79d58-d94b-9ea8-6015-c3cf45e3f94c}">
           <p14:sldIdLst>
             <p14:sldId id="261"/>
             <p14:sldId id="262"/>
             <p14:sldId id="263"/>
           </p14:sldIdLst>
         </p14:section>
-        <p14:section name="Routes" id="{3048355d-5731-bd6a-30b8-c81c8d57d6b3}">
+        <p14:section name="Routes" id="{e326409b-9e3f-f752-4031-f8a1356aab12}">
           <p14:sldIdLst>
             <p14:sldId id="264"/>
             <p14:sldId id="265"/>
             <p14:sldId id="266"/>
           </p14:sldIdLst>
         </p14:section>
-        <p14:section name="Close" id="{95cea8a2-07ca-91d3-607f-351f8dd2da81}">
+        <p14:section name="Close" id="{3f27feba-8db9-0d80-3cac-754fb4a70823}">
           <p14:sldIdLst>
             <p14:sldId id="267"/>
           </p14:sldIdLst>
         </p14:section>
-        <p14:section name="Answers" id="{d3be17be-46de-c0a5-c1bc-fbe0879d0c7e}">
+        <p14:section name="Answers" id="{e0a4585a-b0dc-59d0-6e0f-4ecaabca0c5e}">
           <p14:sldIdLst>
             <p14:sldId id="268"/>
             <p14:sldId id="269"/>
@@ -853,7 +853,7 @@
               <a:rPr lang="en-US" dirty="0"/>
               <a:t>Exit ticket — individual, silent, on a slip or mini-whiteboard. Recall before help: no notes, no lanes, no hints. Collect before pupils leave.
 Question: How many marks is Question 4 worth?
-Answer: C   20. Question 4 is worth 20 marks, half of Section A.
+Answer: A   20. Question 4 is worth 20 marks, half of Section A.
 Source of this question: gate item 1 re-asked (options rotated) — this chapter has no third quick-check module.
 The ebook also holds task 3, "Question 4 practice answer", for homework or the next lesson's do now.
 Sort the slips: correct → ready to move on; incorrect → start next lesson in the pre-teach group, with the read-along and the Support lane. Same destination next time.</a:t>
@@ -945,7 +945,7 @@
             <a:r>
               <a:rPr lang="en-US" dirty="0"/>
               <a:t>Answers — task 1: Find the counter-evidence. Reveal the answer; pupils mark their own work in a different colour, then read the "why" together. Same destination for every lane, so one answer serves the whole class.
-Answer: B   “As the engines roared and the island began to slide away, she turned.”
+Answer: C   “As the engines roared and the island began to slide away, she turned.”
 Why: Turning back as the island slides away suggests Nell is not completely certain. Taking the man’s hand supports the statement; the boat details are neutral.
 Ask a Support pupil to explain one step, and a Stretch pupil to share their extension.</a:t>
             </a:r>
@@ -1127,7 +1127,7 @@
             <a:r>
               <a:rPr lang="en-US" dirty="0"/>
               <a:t>Answers — exit ticket: Exit ticket. Reveal the answer; pupils mark their own work in a different colour, then read the "why" together. Same destination for every lane, so one answer serves the whole class.
-Answer: C   20
+Answer: A   20
 Why: Question 4 is worth 20 marks, half of Section A.
 Ask a Support pupil to explain one step, and a Stretch pupil to share their extension.</a:t>
             </a:r>
@@ -1218,9 +1218,9 @@
             <a:r>
               <a:rPr lang="en-US" dirty="0"/>
               <a:t>Do now — retrieval. Silent, no notes, no help: recall comes before any support. Give about four minutes.
-1. How many marks is Question 4 worth?  →  D   20
+1. How many marks is Question 4 worth?  →  B   20
 2. To argue against a statement, using evidence, is to ___ it.  →  refute
-3. Which sentence shows a weighed final judgement?  →  B   To a large extent I agree, although Nell’s final glance shows some doubt.
+3. Which sentence shows a weighed final judgement?  →  C   To a large extent I agree, although Nell’s final glance shows some doubt.
 Circulate: who gets 3/3 (Stretch route), 2/3 (Core), 0–1 (Support)? Use this to route pupils later in the lesson.</a:t>
             </a:r>
             <a:endParaRPr lang="en-US" dirty="0"/>
@@ -1310,9 +1310,9 @@
             <a:r>
               <a:rPr lang="en-US" dirty="0"/>
               <a:t>Answers — pupils mark their own in a different colour, then hands up for 3/3, 2/3, 1/3.
-1. D   20. Question 4 is worth 20 marks, half of Section A.
+1. B   20. Question 4 is worth 20 marks, half of Section A.
 2. refute. To refute is to argue against with evidence.
-3. B   To a large extent I agree, although Nell’s final glance shows some doubt.. A weighed judgement states how far you agree and recognises the other side.
+3. C   To a large extent I agree, although Nell’s final glance shows some doubt.. A weighed judgement states how far you agree and recognises the other side.
 Say the route each score points to: 3/3 Stretch, 2/3 Core, 0–1 Support. Pupils may choose to move up.</a:t>
             </a:r>
             <a:endParaRPr lang="en-US" dirty="0"/>
@@ -5965,7 +5965,7 @@
                 <a:ea typeface="Calibri" pitchFamily="34" charset="-122"/>
                 <a:cs typeface="Calibri" pitchFamily="34" charset="-120"/>
               </a:rPr>
-              <a:t>12</a:t>
+              <a:t>20</a:t>
             </a:r>
             <a:endParaRPr lang="en-US" sz="2400" dirty="0"/>
           </a:p>
@@ -6002,7 +6002,7 @@
                 <a:ea typeface="Calibri" pitchFamily="34" charset="-122"/>
                 <a:cs typeface="Calibri" pitchFamily="34" charset="-120"/>
               </a:rPr>
-              <a:t>16</a:t>
+              <a:t>8</a:t>
             </a:r>
             <a:endParaRPr lang="en-US" sz="2400" dirty="0"/>
           </a:p>
@@ -6039,7 +6039,7 @@
                 <a:ea typeface="Calibri" pitchFamily="34" charset="-122"/>
                 <a:cs typeface="Calibri" pitchFamily="34" charset="-120"/>
               </a:rPr>
-              <a:t>20</a:t>
+              <a:t>16</a:t>
             </a:r>
             <a:endParaRPr lang="en-US" sz="2400" dirty="0"/>
           </a:p>
@@ -6076,7 +6076,7 @@
                 <a:ea typeface="Calibri" pitchFamily="34" charset="-122"/>
                 <a:cs typeface="Calibri" pitchFamily="34" charset="-120"/>
               </a:rPr>
-              <a:t>8</a:t>
+              <a:t>12</a:t>
             </a:r>
             <a:endParaRPr lang="en-US" sz="2400" dirty="0"/>
           </a:p>
@@ -6481,7 +6481,7 @@
                 <a:ea typeface="Cambria" pitchFamily="34" charset="-122"/>
                 <a:cs typeface="Cambria" pitchFamily="34" charset="-120"/>
               </a:rPr>
-              <a:t>B   “As the engines roared and the island began to slide away, she turned.”</a:t>
+              <a:t>C   “As the engines roared and the island began to slide away, she turned.”</a:t>
             </a:r>
             <a:endParaRPr lang="en-US" sz="1800" dirty="0"/>
           </a:p>
@@ -7547,7 +7547,7 @@
                 <a:ea typeface="Cambria" pitchFamily="34" charset="-122"/>
                 <a:cs typeface="Cambria" pitchFamily="34" charset="-120"/>
               </a:rPr>
-              <a:t>C   20</a:t>
+              <a:t>A   20</a:t>
             </a:r>
             <a:endParaRPr lang="en-US" sz="1800" dirty="0"/>
           </a:p>
@@ -8081,7 +8081,7 @@
                 <a:ea typeface="Calibri" pitchFamily="34" charset="-122"/>
                 <a:cs typeface="Calibri" pitchFamily="34" charset="-120"/>
               </a:rPr>
-              <a:t>8</a:t>
+              <a:t>12</a:t>
             </a:r>
             <a:endParaRPr lang="en-US" sz="2400" dirty="0"/>
           </a:p>
@@ -8118,7 +8118,7 @@
                 <a:ea typeface="Calibri" pitchFamily="34" charset="-122"/>
                 <a:cs typeface="Calibri" pitchFamily="34" charset="-120"/>
               </a:rPr>
-              <a:t>12</a:t>
+              <a:t>20</a:t>
             </a:r>
             <a:endParaRPr lang="en-US" sz="2400" dirty="0"/>
           </a:p>
@@ -8155,7 +8155,7 @@
                 <a:ea typeface="Calibri" pitchFamily="34" charset="-122"/>
                 <a:cs typeface="Calibri" pitchFamily="34" charset="-120"/>
               </a:rPr>
-              <a:t>16</a:t>
+              <a:t>8</a:t>
             </a:r>
             <a:endParaRPr lang="en-US" sz="2400" dirty="0"/>
           </a:p>
@@ -8192,7 +8192,7 @@
                 <a:ea typeface="Calibri" pitchFamily="34" charset="-122"/>
                 <a:cs typeface="Calibri" pitchFamily="34" charset="-120"/>
               </a:rPr>
-              <a:t>20</a:t>
+              <a:t>16</a:t>
             </a:r>
             <a:endParaRPr lang="en-US" sz="2400" dirty="0"/>
           </a:p>
@@ -8549,7 +8549,7 @@
               <a:buNone/>
             </a:pPr>
             <a:r>
-              <a:rPr lang="en-US" sz="2000" b="1" dirty="0">
+              <a:rPr lang="en-US" sz="1800" b="1" dirty="0">
                 <a:solidFill>
                   <a:srgbClr val="1E2229"/>
                 </a:solidFill>
@@ -8559,7 +8559,7 @@
               </a:rPr>
               <a:t>Which sentence shows a weighed final judgement?</a:t>
             </a:r>
-            <a:endParaRPr lang="en-US" sz="2000" dirty="0"/>
+            <a:endParaRPr lang="en-US" sz="1800" dirty="0"/>
           </a:p>
           <a:p>
             <a:pPr algn="l" indent="0" marL="0">
@@ -8569,7 +8569,7 @@
               <a:buNone/>
             </a:pPr>
             <a:r>
-              <a:rPr lang="en-US" sz="2000" b="1" dirty="0">
+              <a:rPr lang="en-US" sz="1800" b="1" dirty="0">
                 <a:solidFill>
                   <a:srgbClr val="B8862B"/>
                 </a:solidFill>
@@ -8586,7 +8586,7 @@
               <a:buNone/>
             </a:pPr>
             <a:r>
-              <a:rPr lang="en-US" sz="2000" dirty="0">
+              <a:rPr lang="en-US" sz="1800" dirty="0">
                 <a:solidFill>
                   <a:srgbClr val="1E2229"/>
                 </a:solidFill>
@@ -8594,9 +8594,9 @@
                 <a:ea typeface="Calibri" pitchFamily="34" charset="-122"/>
                 <a:cs typeface="Calibri" pitchFamily="34" charset="-120"/>
               </a:rPr>
-              <a:t>I agree with everything the student says.</a:t>
-            </a:r>
-            <a:endParaRPr lang="en-US" sz="2000" dirty="0"/>
+              <a:t>I am not sure what I think.</a:t>
+            </a:r>
+            <a:endParaRPr lang="en-US" sz="1800" dirty="0"/>
           </a:p>
           <a:p>
             <a:pPr algn="l" indent="0" marL="0">
@@ -8606,7 +8606,7 @@
               <a:buNone/>
             </a:pPr>
             <a:r>
-              <a:rPr lang="en-US" sz="2000" b="1" dirty="0">
+              <a:rPr lang="en-US" sz="1800" b="1" dirty="0">
                 <a:solidFill>
                   <a:srgbClr val="B8862B"/>
                 </a:solidFill>
@@ -8623,7 +8623,7 @@
               <a:buNone/>
             </a:pPr>
             <a:r>
-              <a:rPr lang="en-US" sz="2000" dirty="0">
+              <a:rPr lang="en-US" sz="1800" dirty="0">
                 <a:solidFill>
                   <a:srgbClr val="1E2229"/>
                 </a:solidFill>
@@ -8631,9 +8631,9 @@
                 <a:ea typeface="Calibri" pitchFamily="34" charset="-122"/>
                 <a:cs typeface="Calibri" pitchFamily="34" charset="-120"/>
               </a:rPr>
-              <a:t>To a large extent I agree, although Nell’s final glance shows some doubt.</a:t>
-            </a:r>
-            <a:endParaRPr lang="en-US" sz="2000" dirty="0"/>
+              <a:t>The story is about a ferry.</a:t>
+            </a:r>
+            <a:endParaRPr lang="en-US" sz="1800" dirty="0"/>
           </a:p>
           <a:p>
             <a:pPr algn="l" indent="0" marL="0">
@@ -8643,7 +8643,7 @@
               <a:buNone/>
             </a:pPr>
             <a:r>
-              <a:rPr lang="en-US" sz="2000" b="1" dirty="0">
+              <a:rPr lang="en-US" sz="1800" b="1" dirty="0">
                 <a:solidFill>
                   <a:srgbClr val="B8862B"/>
                 </a:solidFill>
@@ -8660,7 +8660,7 @@
               <a:buNone/>
             </a:pPr>
             <a:r>
-              <a:rPr lang="en-US" sz="2000" dirty="0">
+              <a:rPr lang="en-US" sz="1800" dirty="0">
                 <a:solidFill>
                   <a:srgbClr val="1E2229"/>
                 </a:solidFill>
@@ -8668,9 +8668,9 @@
                 <a:ea typeface="Calibri" pitchFamily="34" charset="-122"/>
                 <a:cs typeface="Calibri" pitchFamily="34" charset="-120"/>
               </a:rPr>
-              <a:t>The story is about a ferry.</a:t>
-            </a:r>
-            <a:endParaRPr lang="en-US" sz="2000" dirty="0"/>
+              <a:t>To a large extent I agree, although Nell’s final glance shows some doubt.</a:t>
+            </a:r>
+            <a:endParaRPr lang="en-US" sz="1800" dirty="0"/>
           </a:p>
           <a:p>
             <a:pPr algn="l" indent="0" marL="0">
@@ -8680,7 +8680,7 @@
               <a:buNone/>
             </a:pPr>
             <a:r>
-              <a:rPr lang="en-US" sz="2000" b="1" dirty="0">
+              <a:rPr lang="en-US" sz="1800" b="1" dirty="0">
                 <a:solidFill>
                   <a:srgbClr val="B8862B"/>
                 </a:solidFill>
@@ -8697,7 +8697,7 @@
               <a:buNone/>
             </a:pPr>
             <a:r>
-              <a:rPr lang="en-US" sz="2000" dirty="0">
+              <a:rPr lang="en-US" sz="1800" dirty="0">
                 <a:solidFill>
                   <a:srgbClr val="1E2229"/>
                 </a:solidFill>
@@ -8705,9 +8705,9 @@
                 <a:ea typeface="Calibri" pitchFamily="34" charset="-122"/>
                 <a:cs typeface="Calibri" pitchFamily="34" charset="-120"/>
               </a:rPr>
-              <a:t>I am not sure what I think.</a:t>
-            </a:r>
-            <a:endParaRPr lang="en-US" sz="2000" dirty="0"/>
+              <a:t>I agree with everything the student says.</a:t>
+            </a:r>
+            <a:endParaRPr lang="en-US" sz="1800" dirty="0"/>
           </a:p>
         </p:txBody>
       </p:sp>
@@ -9106,7 +9106,7 @@
                 <a:ea typeface="Calibri" pitchFamily="34" charset="-122"/>
                 <a:cs typeface="Calibri" pitchFamily="34" charset="-120"/>
               </a:rPr>
-              <a:t>D   20</a:t>
+              <a:t>B   20</a:t>
             </a:r>
             <a:endParaRPr lang="en-US" sz="2200" dirty="0"/>
           </a:p>
@@ -9606,7 +9606,7 @@
                 <a:ea typeface="Calibri" pitchFamily="34" charset="-122"/>
                 <a:cs typeface="Calibri" pitchFamily="34" charset="-120"/>
               </a:rPr>
-              <a:t>B   To a large extent I agree, although Nell’s final glance shows some doubt.</a:t>
+              <a:t>C   To a large extent I agree, although Nell’s final glance shows some doubt.</a:t>
             </a:r>
             <a:endParaRPr lang="en-US" sz="2200" dirty="0"/>
           </a:p>
@@ -13878,7 +13878,7 @@
                 <a:ea typeface="Calibri" pitchFamily="34" charset="-122"/>
                 <a:cs typeface="Calibri" pitchFamily="34" charset="-120"/>
               </a:rPr>
-              <a:t>“Ropes were thrown.”</a:t>
+              <a:t>“The boat bumped against the jetty.”</a:t>
             </a:r>
             <a:endParaRPr lang="en-US" sz="2600" dirty="0"/>
           </a:p>
@@ -13915,7 +13915,7 @@
                 <a:ea typeface="Calibri" pitchFamily="34" charset="-122"/>
                 <a:cs typeface="Calibri" pitchFamily="34" charset="-120"/>
               </a:rPr>
-              <a:t>“As the engines roared and the island began to slide away, she turned.”</a:t>
+              <a:t>“Ropes were thrown.”</a:t>
             </a:r>
             <a:endParaRPr lang="en-US" sz="2600" dirty="0"/>
           </a:p>
@@ -13952,7 +13952,7 @@
                 <a:ea typeface="Calibri" pitchFamily="34" charset="-122"/>
                 <a:cs typeface="Calibri" pitchFamily="34" charset="-120"/>
               </a:rPr>
-              <a:t>“A man in an orange jacket held out his hand, and Nell took it.”</a:t>
+              <a:t>“As the engines roared and the island began to slide away, she turned.”</a:t>
             </a:r>
             <a:endParaRPr lang="en-US" sz="2600" dirty="0"/>
           </a:p>
@@ -13989,7 +13989,7 @@
                 <a:ea typeface="Calibri" pitchFamily="34" charset="-122"/>
                 <a:cs typeface="Calibri" pitchFamily="34" charset="-120"/>
               </a:rPr>
-              <a:t>“The boat bumped against the jetty.”</a:t>
+              <a:t>“A man in an orange jacket held out his hand, and Nell took it.”</a:t>
             </a:r>
             <a:endParaRPr lang="en-US" sz="2600" dirty="0"/>
           </a:p>

--- a/decks/englang-p1/englang-p1_ch5_q4-evaluation.pptx
+++ b/decks/englang-p1/englang-p1_ch5_q4-evaluation.pptx
@@ -121,47 +121,47 @@
   <p:extLst>
     <p:ext uri="{521415D9-36F7-43E2-AB2F-B90AF26B5E84}">
       <p14:sectionLst xmlns:p14="http://schemas.microsoft.com/office/powerpoint/2010/main">
-        <p14:section name="Opening" id="{0cfcf4fd-1451-098e-6850-b71c2c05d224}">
+        <p14:section name="Opening" id="{4c967d3a-6fd4-0165-92a0-f3c05b9ca96c}">
           <p14:sldIdLst>
             <p14:sldId id="256"/>
           </p14:sldIdLst>
         </p14:section>
-        <p14:section name="Gate" id="{2a0bed3f-1d02-83a0-fb36-167518dcc2b4}">
+        <p14:section name="Gate" id="{9f8db252-d5b9-854d-3de2-c3758acf7bf5}">
           <p14:sldIdLst>
             <p14:sldId id="257"/>
             <p14:sldId id="258"/>
           </p14:sldIdLst>
         </p14:section>
-        <p14:section name="Pre-teach" id="{7ceaae61-faca-73bb-ce2f-3cf669f71795}">
+        <p14:section name="Pre-teach" id="{1a7896be-73d4-dda8-9dde-d4a0b4d03c4f}">
           <p14:sldIdLst>
             <p14:sldId id="259"/>
           </p14:sldIdLst>
         </p14:section>
-        <p14:section name="Read-along" id="{16bf0fe1-b9b1-71f4-38e2-bcd246afb5e6}">
+        <p14:section name="Read-along" id="{2f6c2dd2-d044-30a3-cd13-95f181159491}">
           <p14:sldIdLst>
             <p14:sldId id="260"/>
           </p14:sldIdLst>
         </p14:section>
-        <p14:section name="Teach" id="{84a79d58-d94b-9ea8-6015-c3cf45e3f94c}">
+        <p14:section name="Teach" id="{41ffe8b6-af2b-2759-da7d-af5ba3c213f9}">
           <p14:sldIdLst>
             <p14:sldId id="261"/>
             <p14:sldId id="262"/>
             <p14:sldId id="263"/>
           </p14:sldIdLst>
         </p14:section>
-        <p14:section name="Routes" id="{e326409b-9e3f-f752-4031-f8a1356aab12}">
+        <p14:section name="Routes" id="{025ef0bf-850a-db41-4b3a-6366f1124fe4}">
           <p14:sldIdLst>
             <p14:sldId id="264"/>
             <p14:sldId id="265"/>
             <p14:sldId id="266"/>
           </p14:sldIdLst>
         </p14:section>
-        <p14:section name="Close" id="{3f27feba-8db9-0d80-3cac-754fb4a70823}">
+        <p14:section name="Close" id="{b860787b-3608-287c-56a1-65ea946521ab}">
           <p14:sldIdLst>
             <p14:sldId id="267"/>
           </p14:sldIdLst>
         </p14:section>
-        <p14:section name="Answers" id="{e0a4585a-b0dc-59d0-6e0f-4ecaabca0c5e}">
+        <p14:section name="Answers" id="{a1141fc1-9ddd-caa5-fda4-0729329967fd}">
           <p14:sldIdLst>
             <p14:sldId id="268"/>
             <p14:sldId id="269"/>
